--- a/templates/static/content/text_image_layout_red_business.pptx
+++ b/templates/static/content/text_image_layout_red_business.pptx
@@ -4,6 +4,10 @@
   <p:sldMasterIdLst>
     <p:sldMasterId id="2147483648" r:id="rId1"/>
   </p:sldMasterIdLst>
+  <p:sldIdLst>
+    <p:sldId id="256" r:id="rId7"/>
+    <p:sldId id="257" r:id="rId8"/>
+  </p:sldIdLst>
   <p:sldSz cx="9144000" cy="6858000" type="screen4x3"/>
   <p:notesSz cx="6858000" cy="9144000"/>
   <p:defaultTextStyle>
@@ -3073,6 +3077,1014 @@
     </p:otherStyle>
   </p:txStyles>
 </p:sldMaster>
+</file>
+
+<file path=ppt/slides/slide1.xml><?xml version="1.0" encoding="utf-8"?>
+<p:sld xmlns:a="http://schemas.openxmlformats.org/drawingml/2006/main" xmlns:p="http://schemas.openxmlformats.org/presentationml/2006/main" xmlns:r="http://schemas.openxmlformats.org/officeDocument/2006/relationships">
+  <p:cSld>
+    <p:spTree>
+      <p:nvGrpSpPr>
+        <p:cNvPr id="1" name=""/>
+        <p:cNvGrpSpPr/>
+        <p:nvPr/>
+      </p:nvGrpSpPr>
+      <p:grpSpPr/>
+      <p:sp>
+        <p:nvSpPr>
+          <p:cNvPr id="2" name="Rectangle 1"/>
+          <p:cNvSpPr/>
+          <p:nvPr/>
+        </p:nvSpPr>
+        <p:spPr>
+          <a:xfrm>
+            <a:off x="0" y="0"/>
+            <a:ext cx="9144000" cy="6858000"/>
+          </a:xfrm>
+          <a:prstGeom prst="rect">
+            <a:avLst/>
+          </a:prstGeom>
+          <a:solidFill>
+            <a:srgbClr val="FFFFFF"/>
+          </a:solidFill>
+          <a:ln>
+            <a:noFill/>
+          </a:ln>
+        </p:spPr>
+        <p:style>
+          <a:lnRef idx="1">
+            <a:schemeClr val="accent1"/>
+          </a:lnRef>
+          <a:fillRef idx="3">
+            <a:schemeClr val="accent1"/>
+          </a:fillRef>
+          <a:effectRef idx="2">
+            <a:schemeClr val="accent1"/>
+          </a:effectRef>
+          <a:fontRef idx="minor">
+            <a:schemeClr val="lt1"/>
+          </a:fontRef>
+        </p:style>
+        <p:txBody>
+          <a:bodyPr rtlCol="0" anchor="ctr"/>
+          <a:lstStyle/>
+          <a:p>
+            <a:pPr algn="ctr"/>
+          </a:p>
+        </p:txBody>
+      </p:sp>
+      <p:sp>
+        <p:nvSpPr>
+          <p:cNvPr id="3" name="Rectangle 2"/>
+          <p:cNvSpPr/>
+          <p:nvPr/>
+        </p:nvSpPr>
+        <p:spPr>
+          <a:xfrm>
+            <a:off x="0" y="0"/>
+            <a:ext cx="9144000" cy="54864"/>
+          </a:xfrm>
+          <a:prstGeom prst="rect">
+            <a:avLst/>
+          </a:prstGeom>
+          <a:solidFill>
+            <a:srgbClr val="1976D2"/>
+          </a:solidFill>
+          <a:ln>
+            <a:noFill/>
+          </a:ln>
+        </p:spPr>
+        <p:style>
+          <a:lnRef idx="1">
+            <a:schemeClr val="accent1"/>
+          </a:lnRef>
+          <a:fillRef idx="3">
+            <a:schemeClr val="accent1"/>
+          </a:fillRef>
+          <a:effectRef idx="2">
+            <a:schemeClr val="accent1"/>
+          </a:effectRef>
+          <a:fontRef idx="minor">
+            <a:schemeClr val="lt1"/>
+          </a:fontRef>
+        </p:style>
+        <p:txBody>
+          <a:bodyPr rtlCol="0" anchor="ctr"/>
+          <a:lstStyle/>
+          <a:p>
+            <a:pPr algn="ctr"/>
+          </a:p>
+        </p:txBody>
+      </p:sp>
+      <p:sp>
+        <p:nvSpPr>
+          <p:cNvPr id="4" name="TextBox 3"/>
+          <p:cNvSpPr txBox="1"/>
+          <p:nvPr/>
+        </p:nvSpPr>
+        <p:spPr>
+          <a:xfrm>
+            <a:off x="457200" y="274320"/>
+            <a:ext cx="914400" cy="457200"/>
+          </a:xfrm>
+          <a:prstGeom prst="rect">
+            <a:avLst/>
+          </a:prstGeom>
+          <a:noFill/>
+        </p:spPr>
+        <p:txBody>
+          <a:bodyPr wrap="square">
+            <a:spAutoFit/>
+          </a:bodyPr>
+          <a:lstStyle/>
+          <a:p>
+            <a:pPr algn="l">
+              <a:defRPr sz="3600" b="1">
+                <a:solidFill>
+                  <a:srgbClr val="E0E0E0"/>
+                </a:solidFill>
+              </a:defRPr>
+            </a:pPr>
+            <a:r>
+              <a:t>01</a:t>
+            </a:r>
+          </a:p>
+        </p:txBody>
+      </p:sp>
+      <p:sp>
+        <p:nvSpPr>
+          <p:cNvPr id="5" name="Rounded Rectangle 4"/>
+          <p:cNvSpPr/>
+          <p:nvPr/>
+        </p:nvSpPr>
+        <p:spPr>
+          <a:xfrm>
+            <a:off x="457200" y="1097280"/>
+            <a:ext cx="4114800" cy="5029200"/>
+          </a:xfrm>
+          <a:prstGeom prst="roundRect">
+            <a:avLst/>
+          </a:prstGeom>
+          <a:solidFill>
+            <a:srgbClr val="E3F2FD"/>
+          </a:solidFill>
+          <a:ln w="12700">
+            <a:solidFill>
+              <a:srgbClr val="BBDEFB"/>
+            </a:solidFill>
+          </a:ln>
+        </p:spPr>
+        <p:style>
+          <a:lnRef idx="1">
+            <a:schemeClr val="accent1"/>
+          </a:lnRef>
+          <a:fillRef idx="3">
+            <a:schemeClr val="accent1"/>
+          </a:fillRef>
+          <a:effectRef idx="2">
+            <a:schemeClr val="accent1"/>
+          </a:effectRef>
+          <a:fontRef idx="minor">
+            <a:schemeClr val="lt1"/>
+          </a:fontRef>
+        </p:style>
+        <p:txBody>
+          <a:bodyPr rtlCol="0" anchor="ctr"/>
+          <a:lstStyle/>
+          <a:p>
+            <a:pPr algn="ctr"/>
+          </a:p>
+        </p:txBody>
+      </p:sp>
+      <p:sp>
+        <p:nvSpPr>
+          <p:cNvPr id="6" name="Oval 5"/>
+          <p:cNvSpPr/>
+          <p:nvPr/>
+        </p:nvSpPr>
+        <p:spPr>
+          <a:xfrm>
+            <a:off x="2057400" y="3154680"/>
+            <a:ext cx="914400" cy="914400"/>
+          </a:xfrm>
+          <a:prstGeom prst="ellipse">
+            <a:avLst/>
+          </a:prstGeom>
+          <a:solidFill>
+            <a:srgbClr val="BBDEFB"/>
+          </a:solidFill>
+          <a:ln>
+            <a:noFill/>
+          </a:ln>
+        </p:spPr>
+        <p:style>
+          <a:lnRef idx="1">
+            <a:schemeClr val="accent1"/>
+          </a:lnRef>
+          <a:fillRef idx="3">
+            <a:schemeClr val="accent1"/>
+          </a:fillRef>
+          <a:effectRef idx="2">
+            <a:schemeClr val="accent1"/>
+          </a:effectRef>
+          <a:fontRef idx="minor">
+            <a:schemeClr val="lt1"/>
+          </a:fontRef>
+        </p:style>
+        <p:txBody>
+          <a:bodyPr rtlCol="0" anchor="ctr"/>
+          <a:lstStyle/>
+          <a:p>
+            <a:pPr algn="ctr"/>
+          </a:p>
+        </p:txBody>
+      </p:sp>
+      <p:sp>
+        <p:nvSpPr>
+          <p:cNvPr id="7" name="TextBox 6"/>
+          <p:cNvSpPr txBox="1"/>
+          <p:nvPr/>
+        </p:nvSpPr>
+        <p:spPr>
+          <a:xfrm>
+            <a:off x="2057400" y="3337560"/>
+            <a:ext cx="914400" cy="457200"/>
+          </a:xfrm>
+          <a:prstGeom prst="rect">
+            <a:avLst/>
+          </a:prstGeom>
+          <a:noFill/>
+        </p:spPr>
+        <p:txBody>
+          <a:bodyPr wrap="square">
+            <a:spAutoFit/>
+          </a:bodyPr>
+          <a:lstStyle/>
+          <a:p>
+            <a:pPr algn="ctr">
+              <a:defRPr sz="1400" b="1">
+                <a:solidFill>
+                  <a:srgbClr val="1976D2"/>
+                </a:solidFill>
+              </a:defRPr>
+            </a:pPr>
+            <a:r>
+              <a:t>IMG</a:t>
+            </a:r>
+          </a:p>
+        </p:txBody>
+      </p:sp>
+      <p:sp>
+        <p:nvSpPr>
+          <p:cNvPr id="8" name="Rectangle 7"/>
+          <p:cNvSpPr/>
+          <p:nvPr/>
+        </p:nvSpPr>
+        <p:spPr>
+          <a:xfrm>
+            <a:off x="4892040" y="1371600"/>
+            <a:ext cx="45720" cy="914400"/>
+          </a:xfrm>
+          <a:prstGeom prst="rect">
+            <a:avLst/>
+          </a:prstGeom>
+          <a:solidFill>
+            <a:srgbClr val="1976D2"/>
+          </a:solidFill>
+          <a:ln>
+            <a:noFill/>
+          </a:ln>
+        </p:spPr>
+        <p:style>
+          <a:lnRef idx="1">
+            <a:schemeClr val="accent1"/>
+          </a:lnRef>
+          <a:fillRef idx="3">
+            <a:schemeClr val="accent1"/>
+          </a:fillRef>
+          <a:effectRef idx="2">
+            <a:schemeClr val="accent1"/>
+          </a:effectRef>
+          <a:fontRef idx="minor">
+            <a:schemeClr val="lt1"/>
+          </a:fontRef>
+        </p:style>
+        <p:txBody>
+          <a:bodyPr rtlCol="0" anchor="ctr"/>
+          <a:lstStyle/>
+          <a:p>
+            <a:pPr algn="ctr"/>
+          </a:p>
+        </p:txBody>
+      </p:sp>
+      <p:sp>
+        <p:nvSpPr>
+          <p:cNvPr id="9" name="TextBox 8"/>
+          <p:cNvSpPr txBox="1"/>
+          <p:nvPr/>
+        </p:nvSpPr>
+        <p:spPr>
+          <a:xfrm>
+            <a:off x="5029200" y="1371600"/>
+            <a:ext cx="3657600" cy="457200"/>
+          </a:xfrm>
+          <a:prstGeom prst="rect">
+            <a:avLst/>
+          </a:prstGeom>
+          <a:noFill/>
+        </p:spPr>
+        <p:txBody>
+          <a:bodyPr wrap="square">
+            <a:spAutoFit/>
+          </a:bodyPr>
+          <a:lstStyle/>
+          <a:p>
+            <a:pPr algn="l">
+              <a:defRPr sz="2400" b="1">
+                <a:solidFill>
+                  <a:srgbClr val="212121"/>
+                </a:solidFill>
+              </a:defRPr>
+            </a:pPr>
+            <a:r>
+              <a:t>项目背景</a:t>
+            </a:r>
+          </a:p>
+        </p:txBody>
+      </p:sp>
+      <p:sp>
+        <p:nvSpPr>
+          <p:cNvPr id="10" name="TextBox 9"/>
+          <p:cNvSpPr txBox="1"/>
+          <p:nvPr/>
+        </p:nvSpPr>
+        <p:spPr>
+          <a:xfrm>
+            <a:off x="5029200" y="2011680"/>
+            <a:ext cx="3657600" cy="3200400"/>
+          </a:xfrm>
+          <a:prstGeom prst="rect">
+            <a:avLst/>
+          </a:prstGeom>
+          <a:noFill/>
+        </p:spPr>
+        <p:txBody>
+          <a:bodyPr wrap="square">
+            <a:spAutoFit/>
+          </a:bodyPr>
+          <a:lstStyle/>
+          <a:p>
+            <a:pPr algn="l">
+              <a:defRPr sz="1400" b="0">
+                <a:solidFill>
+                  <a:srgbClr val="616161"/>
+                </a:solidFill>
+              </a:defRPr>
+            </a:pPr>
+            <a:r>
+              <a:t>业务规模持续扩大，原有的人工制作方式已无法满足交付节奏，需要一套可复用、可参数化的演示文稿生成方案。</a:t>
+            </a:r>
+          </a:p>
+        </p:txBody>
+      </p:sp>
+      <p:sp>
+        <p:nvSpPr>
+          <p:cNvPr id="11" name="Oval 10"/>
+          <p:cNvSpPr/>
+          <p:nvPr/>
+        </p:nvSpPr>
+        <p:spPr>
+          <a:xfrm>
+            <a:off x="5029200" y="5669280"/>
+            <a:ext cx="73152" cy="73152"/>
+          </a:xfrm>
+          <a:prstGeom prst="ellipse">
+            <a:avLst/>
+          </a:prstGeom>
+          <a:solidFill>
+            <a:srgbClr val="1976D2"/>
+          </a:solidFill>
+          <a:ln>
+            <a:noFill/>
+          </a:ln>
+        </p:spPr>
+        <p:style>
+          <a:lnRef idx="1">
+            <a:schemeClr val="accent1"/>
+          </a:lnRef>
+          <a:fillRef idx="3">
+            <a:schemeClr val="accent1"/>
+          </a:fillRef>
+          <a:effectRef idx="2">
+            <a:schemeClr val="accent1"/>
+          </a:effectRef>
+          <a:fontRef idx="minor">
+            <a:schemeClr val="lt1"/>
+          </a:fontRef>
+        </p:style>
+        <p:txBody>
+          <a:bodyPr rtlCol="0" anchor="ctr"/>
+          <a:lstStyle/>
+          <a:p>
+            <a:pPr algn="ctr"/>
+          </a:p>
+        </p:txBody>
+      </p:sp>
+      <p:sp>
+        <p:nvSpPr>
+          <p:cNvPr id="12" name="Oval 11"/>
+          <p:cNvSpPr/>
+          <p:nvPr/>
+        </p:nvSpPr>
+        <p:spPr>
+          <a:xfrm>
+            <a:off x="5257800" y="5669280"/>
+            <a:ext cx="73152" cy="73152"/>
+          </a:xfrm>
+          <a:prstGeom prst="ellipse">
+            <a:avLst/>
+          </a:prstGeom>
+          <a:solidFill>
+            <a:srgbClr val="1976D2"/>
+          </a:solidFill>
+          <a:ln>
+            <a:noFill/>
+          </a:ln>
+        </p:spPr>
+        <p:style>
+          <a:lnRef idx="1">
+            <a:schemeClr val="accent1"/>
+          </a:lnRef>
+          <a:fillRef idx="3">
+            <a:schemeClr val="accent1"/>
+          </a:fillRef>
+          <a:effectRef idx="2">
+            <a:schemeClr val="accent1"/>
+          </a:effectRef>
+          <a:fontRef idx="minor">
+            <a:schemeClr val="lt1"/>
+          </a:fontRef>
+        </p:style>
+        <p:txBody>
+          <a:bodyPr rtlCol="0" anchor="ctr"/>
+          <a:lstStyle/>
+          <a:p>
+            <a:pPr algn="ctr"/>
+          </a:p>
+        </p:txBody>
+      </p:sp>
+      <p:sp>
+        <p:nvSpPr>
+          <p:cNvPr id="13" name="Oval 12"/>
+          <p:cNvSpPr/>
+          <p:nvPr/>
+        </p:nvSpPr>
+        <p:spPr>
+          <a:xfrm>
+            <a:off x="5486400" y="5669280"/>
+            <a:ext cx="73152" cy="73152"/>
+          </a:xfrm>
+          <a:prstGeom prst="ellipse">
+            <a:avLst/>
+          </a:prstGeom>
+          <a:solidFill>
+            <a:srgbClr val="1976D2"/>
+          </a:solidFill>
+          <a:ln>
+            <a:noFill/>
+          </a:ln>
+        </p:spPr>
+        <p:style>
+          <a:lnRef idx="1">
+            <a:schemeClr val="accent1"/>
+          </a:lnRef>
+          <a:fillRef idx="3">
+            <a:schemeClr val="accent1"/>
+          </a:fillRef>
+          <a:effectRef idx="2">
+            <a:schemeClr val="accent1"/>
+          </a:effectRef>
+          <a:fontRef idx="minor">
+            <a:schemeClr val="lt1"/>
+          </a:fontRef>
+        </p:style>
+        <p:txBody>
+          <a:bodyPr rtlCol="0" anchor="ctr"/>
+          <a:lstStyle/>
+          <a:p>
+            <a:pPr algn="ctr"/>
+          </a:p>
+        </p:txBody>
+      </p:sp>
+    </p:spTree>
+  </p:cSld>
+  <p:clrMapOvr>
+    <a:masterClrMapping/>
+  </p:clrMapOvr>
+</p:sld>
+</file>
+
+<file path=ppt/slides/slide2.xml><?xml version="1.0" encoding="utf-8"?>
+<p:sld xmlns:a="http://schemas.openxmlformats.org/drawingml/2006/main" xmlns:p="http://schemas.openxmlformats.org/presentationml/2006/main" xmlns:r="http://schemas.openxmlformats.org/officeDocument/2006/relationships">
+  <p:cSld>
+    <p:spTree>
+      <p:nvGrpSpPr>
+        <p:cNvPr id="1" name=""/>
+        <p:cNvGrpSpPr/>
+        <p:nvPr/>
+      </p:nvGrpSpPr>
+      <p:grpSpPr/>
+      <p:sp>
+        <p:nvSpPr>
+          <p:cNvPr id="2" name="Rectangle 1"/>
+          <p:cNvSpPr/>
+          <p:nvPr/>
+        </p:nvSpPr>
+        <p:spPr>
+          <a:xfrm>
+            <a:off x="0" y="0"/>
+            <a:ext cx="9144000" cy="6858000"/>
+          </a:xfrm>
+          <a:prstGeom prst="rect">
+            <a:avLst/>
+          </a:prstGeom>
+          <a:solidFill>
+            <a:srgbClr val="FFFFFF"/>
+          </a:solidFill>
+          <a:ln>
+            <a:noFill/>
+          </a:ln>
+        </p:spPr>
+        <p:style>
+          <a:lnRef idx="1">
+            <a:schemeClr val="accent1"/>
+          </a:lnRef>
+          <a:fillRef idx="3">
+            <a:schemeClr val="accent1"/>
+          </a:fillRef>
+          <a:effectRef idx="2">
+            <a:schemeClr val="accent1"/>
+          </a:effectRef>
+          <a:fontRef idx="minor">
+            <a:schemeClr val="lt1"/>
+          </a:fontRef>
+        </p:style>
+        <p:txBody>
+          <a:bodyPr rtlCol="0" anchor="ctr"/>
+          <a:lstStyle/>
+          <a:p>
+            <a:pPr algn="ctr"/>
+          </a:p>
+        </p:txBody>
+      </p:sp>
+      <p:sp>
+        <p:nvSpPr>
+          <p:cNvPr id="3" name="Rectangle 2"/>
+          <p:cNvSpPr/>
+          <p:nvPr/>
+        </p:nvSpPr>
+        <p:spPr>
+          <a:xfrm>
+            <a:off x="0" y="0"/>
+            <a:ext cx="9144000" cy="54864"/>
+          </a:xfrm>
+          <a:prstGeom prst="rect">
+            <a:avLst/>
+          </a:prstGeom>
+          <a:solidFill>
+            <a:srgbClr val="1976D2"/>
+          </a:solidFill>
+          <a:ln>
+            <a:noFill/>
+          </a:ln>
+        </p:spPr>
+        <p:style>
+          <a:lnRef idx="1">
+            <a:schemeClr val="accent1"/>
+          </a:lnRef>
+          <a:fillRef idx="3">
+            <a:schemeClr val="accent1"/>
+          </a:fillRef>
+          <a:effectRef idx="2">
+            <a:schemeClr val="accent1"/>
+          </a:effectRef>
+          <a:fontRef idx="minor">
+            <a:schemeClr val="lt1"/>
+          </a:fontRef>
+        </p:style>
+        <p:txBody>
+          <a:bodyPr rtlCol="0" anchor="ctr"/>
+          <a:lstStyle/>
+          <a:p>
+            <a:pPr algn="ctr"/>
+          </a:p>
+        </p:txBody>
+      </p:sp>
+      <p:sp>
+        <p:nvSpPr>
+          <p:cNvPr id="4" name="TextBox 3"/>
+          <p:cNvSpPr txBox="1"/>
+          <p:nvPr/>
+        </p:nvSpPr>
+        <p:spPr>
+          <a:xfrm>
+            <a:off x="457200" y="274320"/>
+            <a:ext cx="914400" cy="457200"/>
+          </a:xfrm>
+          <a:prstGeom prst="rect">
+            <a:avLst/>
+          </a:prstGeom>
+          <a:noFill/>
+        </p:spPr>
+        <p:txBody>
+          <a:bodyPr wrap="square">
+            <a:spAutoFit/>
+          </a:bodyPr>
+          <a:lstStyle/>
+          <a:p>
+            <a:pPr algn="l">
+              <a:defRPr sz="3600" b="1">
+                <a:solidFill>
+                  <a:srgbClr val="E0E0E0"/>
+                </a:solidFill>
+              </a:defRPr>
+            </a:pPr>
+            <a:r>
+              <a:t>02</a:t>
+            </a:r>
+          </a:p>
+        </p:txBody>
+      </p:sp>
+      <p:sp>
+        <p:nvSpPr>
+          <p:cNvPr id="5" name="Rectangle 4"/>
+          <p:cNvSpPr/>
+          <p:nvPr/>
+        </p:nvSpPr>
+        <p:spPr>
+          <a:xfrm>
+            <a:off x="457200" y="1371600"/>
+            <a:ext cx="45720" cy="914400"/>
+          </a:xfrm>
+          <a:prstGeom prst="rect">
+            <a:avLst/>
+          </a:prstGeom>
+          <a:solidFill>
+            <a:srgbClr val="1976D2"/>
+          </a:solidFill>
+          <a:ln>
+            <a:noFill/>
+          </a:ln>
+        </p:spPr>
+        <p:style>
+          <a:lnRef idx="1">
+            <a:schemeClr val="accent1"/>
+          </a:lnRef>
+          <a:fillRef idx="3">
+            <a:schemeClr val="accent1"/>
+          </a:fillRef>
+          <a:effectRef idx="2">
+            <a:schemeClr val="accent1"/>
+          </a:effectRef>
+          <a:fontRef idx="minor">
+            <a:schemeClr val="lt1"/>
+          </a:fontRef>
+        </p:style>
+        <p:txBody>
+          <a:bodyPr rtlCol="0" anchor="ctr"/>
+          <a:lstStyle/>
+          <a:p>
+            <a:pPr algn="ctr"/>
+          </a:p>
+        </p:txBody>
+      </p:sp>
+      <p:sp>
+        <p:nvSpPr>
+          <p:cNvPr id="6" name="TextBox 5"/>
+          <p:cNvSpPr txBox="1"/>
+          <p:nvPr/>
+        </p:nvSpPr>
+        <p:spPr>
+          <a:xfrm>
+            <a:off x="640080" y="1371600"/>
+            <a:ext cx="3657600" cy="457200"/>
+          </a:xfrm>
+          <a:prstGeom prst="rect">
+            <a:avLst/>
+          </a:prstGeom>
+          <a:noFill/>
+        </p:spPr>
+        <p:txBody>
+          <a:bodyPr wrap="square">
+            <a:spAutoFit/>
+          </a:bodyPr>
+          <a:lstStyle/>
+          <a:p>
+            <a:pPr algn="l">
+              <a:defRPr sz="2400" b="1">
+                <a:solidFill>
+                  <a:srgbClr val="212121"/>
+                </a:solidFill>
+              </a:defRPr>
+            </a:pPr>
+            <a:r>
+              <a:t>核心方案</a:t>
+            </a:r>
+          </a:p>
+        </p:txBody>
+      </p:sp>
+      <p:sp>
+        <p:nvSpPr>
+          <p:cNvPr id="7" name="TextBox 6"/>
+          <p:cNvSpPr txBox="1"/>
+          <p:nvPr/>
+        </p:nvSpPr>
+        <p:spPr>
+          <a:xfrm>
+            <a:off x="640080" y="2011680"/>
+            <a:ext cx="3657600" cy="3200400"/>
+          </a:xfrm>
+          <a:prstGeom prst="rect">
+            <a:avLst/>
+          </a:prstGeom>
+          <a:noFill/>
+        </p:spPr>
+        <p:txBody>
+          <a:bodyPr wrap="square">
+            <a:spAutoFit/>
+          </a:bodyPr>
+          <a:lstStyle/>
+          <a:p>
+            <a:pPr algn="l">
+              <a:defRPr sz="1400" b="0">
+                <a:solidFill>
+                  <a:srgbClr val="616161"/>
+                </a:solidFill>
+              </a:defRPr>
+            </a:pPr>
+            <a:r>
+              <a:t>以主题系统与生成器族解耦内容与样式，一份数据可同时驱动 Python 与 TypeScript 两端渲染。</a:t>
+            </a:r>
+          </a:p>
+        </p:txBody>
+      </p:sp>
+      <p:sp>
+        <p:nvSpPr>
+          <p:cNvPr id="8" name="Rounded Rectangle 7"/>
+          <p:cNvSpPr/>
+          <p:nvPr/>
+        </p:nvSpPr>
+        <p:spPr>
+          <a:xfrm>
+            <a:off x="4572000" y="1097280"/>
+            <a:ext cx="4114800" cy="5029200"/>
+          </a:xfrm>
+          <a:prstGeom prst="roundRect">
+            <a:avLst/>
+          </a:prstGeom>
+          <a:solidFill>
+            <a:srgbClr val="FFF3E0"/>
+          </a:solidFill>
+          <a:ln w="12700">
+            <a:solidFill>
+              <a:srgbClr val="FFE0B2"/>
+            </a:solidFill>
+          </a:ln>
+        </p:spPr>
+        <p:style>
+          <a:lnRef idx="1">
+            <a:schemeClr val="accent1"/>
+          </a:lnRef>
+          <a:fillRef idx="3">
+            <a:schemeClr val="accent1"/>
+          </a:fillRef>
+          <a:effectRef idx="2">
+            <a:schemeClr val="accent1"/>
+          </a:effectRef>
+          <a:fontRef idx="minor">
+            <a:schemeClr val="lt1"/>
+          </a:fontRef>
+        </p:style>
+        <p:txBody>
+          <a:bodyPr rtlCol="0" anchor="ctr"/>
+          <a:lstStyle/>
+          <a:p>
+            <a:pPr algn="ctr"/>
+          </a:p>
+        </p:txBody>
+      </p:sp>
+      <p:sp>
+        <p:nvSpPr>
+          <p:cNvPr id="9" name="Oval 8"/>
+          <p:cNvSpPr/>
+          <p:nvPr/>
+        </p:nvSpPr>
+        <p:spPr>
+          <a:xfrm>
+            <a:off x="6172200" y="3154680"/>
+            <a:ext cx="914400" cy="914400"/>
+          </a:xfrm>
+          <a:prstGeom prst="ellipse">
+            <a:avLst/>
+          </a:prstGeom>
+          <a:solidFill>
+            <a:srgbClr val="FFE0B2"/>
+          </a:solidFill>
+          <a:ln>
+            <a:noFill/>
+          </a:ln>
+        </p:spPr>
+        <p:style>
+          <a:lnRef idx="1">
+            <a:schemeClr val="accent1"/>
+          </a:lnRef>
+          <a:fillRef idx="3">
+            <a:schemeClr val="accent1"/>
+          </a:fillRef>
+          <a:effectRef idx="2">
+            <a:schemeClr val="accent1"/>
+          </a:effectRef>
+          <a:fontRef idx="minor">
+            <a:schemeClr val="lt1"/>
+          </a:fontRef>
+        </p:style>
+        <p:txBody>
+          <a:bodyPr rtlCol="0" anchor="ctr"/>
+          <a:lstStyle/>
+          <a:p>
+            <a:pPr algn="ctr"/>
+          </a:p>
+        </p:txBody>
+      </p:sp>
+      <p:sp>
+        <p:nvSpPr>
+          <p:cNvPr id="10" name="TextBox 9"/>
+          <p:cNvSpPr txBox="1"/>
+          <p:nvPr/>
+        </p:nvSpPr>
+        <p:spPr>
+          <a:xfrm>
+            <a:off x="6172200" y="3337560"/>
+            <a:ext cx="914400" cy="457200"/>
+          </a:xfrm>
+          <a:prstGeom prst="rect">
+            <a:avLst/>
+          </a:prstGeom>
+          <a:noFill/>
+        </p:spPr>
+        <p:txBody>
+          <a:bodyPr wrap="square">
+            <a:spAutoFit/>
+          </a:bodyPr>
+          <a:lstStyle/>
+          <a:p>
+            <a:pPr algn="ctr">
+              <a:defRPr sz="1400" b="1">
+                <a:solidFill>
+                  <a:srgbClr val="E65100"/>
+                </a:solidFill>
+              </a:defRPr>
+            </a:pPr>
+            <a:r>
+              <a:t>IMG</a:t>
+            </a:r>
+          </a:p>
+        </p:txBody>
+      </p:sp>
+      <p:sp>
+        <p:nvSpPr>
+          <p:cNvPr id="11" name="Oval 10"/>
+          <p:cNvSpPr/>
+          <p:nvPr/>
+        </p:nvSpPr>
+        <p:spPr>
+          <a:xfrm>
+            <a:off x="640080" y="5669280"/>
+            <a:ext cx="73152" cy="73152"/>
+          </a:xfrm>
+          <a:prstGeom prst="ellipse">
+            <a:avLst/>
+          </a:prstGeom>
+          <a:solidFill>
+            <a:srgbClr val="1976D2"/>
+          </a:solidFill>
+          <a:ln>
+            <a:noFill/>
+          </a:ln>
+        </p:spPr>
+        <p:style>
+          <a:lnRef idx="1">
+            <a:schemeClr val="accent1"/>
+          </a:lnRef>
+          <a:fillRef idx="3">
+            <a:schemeClr val="accent1"/>
+          </a:fillRef>
+          <a:effectRef idx="2">
+            <a:schemeClr val="accent1"/>
+          </a:effectRef>
+          <a:fontRef idx="minor">
+            <a:schemeClr val="lt1"/>
+          </a:fontRef>
+        </p:style>
+        <p:txBody>
+          <a:bodyPr rtlCol="0" anchor="ctr"/>
+          <a:lstStyle/>
+          <a:p>
+            <a:pPr algn="ctr"/>
+          </a:p>
+        </p:txBody>
+      </p:sp>
+      <p:sp>
+        <p:nvSpPr>
+          <p:cNvPr id="12" name="Oval 11"/>
+          <p:cNvSpPr/>
+          <p:nvPr/>
+        </p:nvSpPr>
+        <p:spPr>
+          <a:xfrm>
+            <a:off x="868680" y="5669280"/>
+            <a:ext cx="73152" cy="73152"/>
+          </a:xfrm>
+          <a:prstGeom prst="ellipse">
+            <a:avLst/>
+          </a:prstGeom>
+          <a:solidFill>
+            <a:srgbClr val="1976D2"/>
+          </a:solidFill>
+          <a:ln>
+            <a:noFill/>
+          </a:ln>
+        </p:spPr>
+        <p:style>
+          <a:lnRef idx="1">
+            <a:schemeClr val="accent1"/>
+          </a:lnRef>
+          <a:fillRef idx="3">
+            <a:schemeClr val="accent1"/>
+          </a:fillRef>
+          <a:effectRef idx="2">
+            <a:schemeClr val="accent1"/>
+          </a:effectRef>
+          <a:fontRef idx="minor">
+            <a:schemeClr val="lt1"/>
+          </a:fontRef>
+        </p:style>
+        <p:txBody>
+          <a:bodyPr rtlCol="0" anchor="ctr"/>
+          <a:lstStyle/>
+          <a:p>
+            <a:pPr algn="ctr"/>
+          </a:p>
+        </p:txBody>
+      </p:sp>
+      <p:sp>
+        <p:nvSpPr>
+          <p:cNvPr id="13" name="Oval 12"/>
+          <p:cNvSpPr/>
+          <p:nvPr/>
+        </p:nvSpPr>
+        <p:spPr>
+          <a:xfrm>
+            <a:off x="1097280" y="5669280"/>
+            <a:ext cx="73152" cy="73152"/>
+          </a:xfrm>
+          <a:prstGeom prst="ellipse">
+            <a:avLst/>
+          </a:prstGeom>
+          <a:solidFill>
+            <a:srgbClr val="1976D2"/>
+          </a:solidFill>
+          <a:ln>
+            <a:noFill/>
+          </a:ln>
+        </p:spPr>
+        <p:style>
+          <a:lnRef idx="1">
+            <a:schemeClr val="accent1"/>
+          </a:lnRef>
+          <a:fillRef idx="3">
+            <a:schemeClr val="accent1"/>
+          </a:fillRef>
+          <a:effectRef idx="2">
+            <a:schemeClr val="accent1"/>
+          </a:effectRef>
+          <a:fontRef idx="minor">
+            <a:schemeClr val="lt1"/>
+          </a:fontRef>
+        </p:style>
+        <p:txBody>
+          <a:bodyPr rtlCol="0" anchor="ctr"/>
+          <a:lstStyle/>
+          <a:p>
+            <a:pPr algn="ctr"/>
+          </a:p>
+        </p:txBody>
+      </p:sp>
+    </p:spTree>
+  </p:cSld>
+  <p:clrMapOvr>
+    <a:masterClrMapping/>
+  </p:clrMapOvr>
+</p:sld>
 </file>
 
 <file path=ppt/theme/theme1.xml><?xml version="1.0" encoding="utf-8"?>

--- a/templates/static/content/text_image_layout_red_business.pptx
+++ b/templates/static/content/text_image_layout_red_business.pptx
@@ -3147,7 +3147,7 @@
             <a:avLst/>
           </a:prstGeom>
           <a:solidFill>
-            <a:srgbClr val="1976D2"/>
+            <a:srgbClr val="C0392B"/>
           </a:solidFill>
           <a:ln>
             <a:noFill/>
@@ -3348,7 +3348,7 @@
             <a:avLst/>
           </a:prstGeom>
           <a:solidFill>
-            <a:srgbClr val="1976D2"/>
+            <a:srgbClr val="C0392B"/>
           </a:solidFill>
           <a:ln>
             <a:noFill/>
@@ -3461,7 +3461,7 @@
             <a:avLst/>
           </a:prstGeom>
           <a:solidFill>
-            <a:srgbClr val="1976D2"/>
+            <a:srgbClr val="C0392B"/>
           </a:solidFill>
           <a:ln>
             <a:noFill/>
@@ -3504,7 +3504,7 @@
             <a:avLst/>
           </a:prstGeom>
           <a:solidFill>
-            <a:srgbClr val="1976D2"/>
+            <a:srgbClr val="C0392B"/>
           </a:solidFill>
           <a:ln>
             <a:noFill/>
@@ -3547,7 +3547,7 @@
             <a:avLst/>
           </a:prstGeom>
           <a:solidFill>
-            <a:srgbClr val="1976D2"/>
+            <a:srgbClr val="C0392B"/>
           </a:solidFill>
           <a:ln>
             <a:noFill/>
@@ -3651,7 +3651,7 @@
             <a:avLst/>
           </a:prstGeom>
           <a:solidFill>
-            <a:srgbClr val="1976D2"/>
+            <a:srgbClr val="C0392B"/>
           </a:solidFill>
           <a:ln>
             <a:noFill/>
@@ -3729,7 +3729,7 @@
             <a:avLst/>
           </a:prstGeom>
           <a:solidFill>
-            <a:srgbClr val="1976D2"/>
+            <a:srgbClr val="C0392B"/>
           </a:solidFill>
           <a:ln>
             <a:noFill/>
@@ -3965,7 +3965,7 @@
             <a:avLst/>
           </a:prstGeom>
           <a:solidFill>
-            <a:srgbClr val="1976D2"/>
+            <a:srgbClr val="C0392B"/>
           </a:solidFill>
           <a:ln>
             <a:noFill/>
@@ -4008,7 +4008,7 @@
             <a:avLst/>
           </a:prstGeom>
           <a:solidFill>
-            <a:srgbClr val="1976D2"/>
+            <a:srgbClr val="C0392B"/>
           </a:solidFill>
           <a:ln>
             <a:noFill/>
@@ -4051,7 +4051,7 @@
             <a:avLst/>
           </a:prstGeom>
           <a:solidFill>
-            <a:srgbClr val="1976D2"/>
+            <a:srgbClr val="C0392B"/>
           </a:solidFill>
           <a:ln>
             <a:noFill/>
